--- a/仕様書/ステージ.pptx
+++ b/仕様書/ステージ.pptx
@@ -104,6 +104,11 @@
       </a:defRPr>
     </a:lvl9pPr>
   </p:defaultTextStyle>
+  <p:extLst>
+    <p:ext uri="{EFAFB233-063F-42B5-8137-9DF3F51BA10A}">
+      <p15:sldGuideLst xmlns:p15="http://schemas.microsoft.com/office/powerpoint/2012/main"/>
+    </p:ext>
+  </p:extLst>
 </p:presentation>
 </file>
 
@@ -254,7 +259,7 @@
           <a:p>
             <a:fld id="{16E7E9E6-0AF9-480C-A1F8-8E6CDA39B193}" type="datetimeFigureOut">
               <a:rPr kumimoji="1" lang="ja-JP" altLang="en-US" smtClean="0"/>
-              <a:t>2026/6/11</a:t>
+              <a:t>2026/6/18</a:t>
             </a:fld>
             <a:endParaRPr kumimoji="1" lang="ja-JP" altLang="en-US"/>
           </a:p>
@@ -484,7 +489,7 @@
           <a:p>
             <a:fld id="{16E7E9E6-0AF9-480C-A1F8-8E6CDA39B193}" type="datetimeFigureOut">
               <a:rPr kumimoji="1" lang="ja-JP" altLang="en-US" smtClean="0"/>
-              <a:t>2026/6/11</a:t>
+              <a:t>2026/6/18</a:t>
             </a:fld>
             <a:endParaRPr kumimoji="1" lang="ja-JP" altLang="en-US"/>
           </a:p>
@@ -724,7 +729,7 @@
           <a:p>
             <a:fld id="{16E7E9E6-0AF9-480C-A1F8-8E6CDA39B193}" type="datetimeFigureOut">
               <a:rPr kumimoji="1" lang="ja-JP" altLang="en-US" smtClean="0"/>
-              <a:t>2026/6/11</a:t>
+              <a:t>2026/6/18</a:t>
             </a:fld>
             <a:endParaRPr kumimoji="1" lang="ja-JP" altLang="en-US"/>
           </a:p>
@@ -954,7 +959,7 @@
           <a:p>
             <a:fld id="{16E7E9E6-0AF9-480C-A1F8-8E6CDA39B193}" type="datetimeFigureOut">
               <a:rPr kumimoji="1" lang="ja-JP" altLang="en-US" smtClean="0"/>
-              <a:t>2026/6/11</a:t>
+              <a:t>2026/6/18</a:t>
             </a:fld>
             <a:endParaRPr kumimoji="1" lang="ja-JP" altLang="en-US"/>
           </a:p>
@@ -1229,7 +1234,7 @@
           <a:p>
             <a:fld id="{16E7E9E6-0AF9-480C-A1F8-8E6CDA39B193}" type="datetimeFigureOut">
               <a:rPr kumimoji="1" lang="ja-JP" altLang="en-US" smtClean="0"/>
-              <a:t>2026/6/11</a:t>
+              <a:t>2026/6/18</a:t>
             </a:fld>
             <a:endParaRPr kumimoji="1" lang="ja-JP" altLang="en-US"/>
           </a:p>
@@ -1558,7 +1563,7 @@
           <a:p>
             <a:fld id="{16E7E9E6-0AF9-480C-A1F8-8E6CDA39B193}" type="datetimeFigureOut">
               <a:rPr kumimoji="1" lang="ja-JP" altLang="en-US" smtClean="0"/>
-              <a:t>2026/6/11</a:t>
+              <a:t>2026/6/18</a:t>
             </a:fld>
             <a:endParaRPr kumimoji="1" lang="ja-JP" altLang="en-US"/>
           </a:p>
@@ -2034,7 +2039,7 @@
           <a:p>
             <a:fld id="{16E7E9E6-0AF9-480C-A1F8-8E6CDA39B193}" type="datetimeFigureOut">
               <a:rPr kumimoji="1" lang="ja-JP" altLang="en-US" smtClean="0"/>
-              <a:t>2026/6/11</a:t>
+              <a:t>2026/6/18</a:t>
             </a:fld>
             <a:endParaRPr kumimoji="1" lang="ja-JP" altLang="en-US"/>
           </a:p>
@@ -2175,7 +2180,7 @@
           <a:p>
             <a:fld id="{16E7E9E6-0AF9-480C-A1F8-8E6CDA39B193}" type="datetimeFigureOut">
               <a:rPr kumimoji="1" lang="ja-JP" altLang="en-US" smtClean="0"/>
-              <a:t>2026/6/11</a:t>
+              <a:t>2026/6/18</a:t>
             </a:fld>
             <a:endParaRPr kumimoji="1" lang="ja-JP" altLang="en-US"/>
           </a:p>
@@ -2288,7 +2293,7 @@
           <a:p>
             <a:fld id="{16E7E9E6-0AF9-480C-A1F8-8E6CDA39B193}" type="datetimeFigureOut">
               <a:rPr kumimoji="1" lang="ja-JP" altLang="en-US" smtClean="0"/>
-              <a:t>2026/6/11</a:t>
+              <a:t>2026/6/18</a:t>
             </a:fld>
             <a:endParaRPr kumimoji="1" lang="ja-JP" altLang="en-US"/>
           </a:p>
@@ -2631,7 +2636,7 @@
           <a:p>
             <a:fld id="{16E7E9E6-0AF9-480C-A1F8-8E6CDA39B193}" type="datetimeFigureOut">
               <a:rPr kumimoji="1" lang="ja-JP" altLang="en-US" smtClean="0"/>
-              <a:t>2026/6/11</a:t>
+              <a:t>2026/6/18</a:t>
             </a:fld>
             <a:endParaRPr kumimoji="1" lang="ja-JP" altLang="en-US"/>
           </a:p>
@@ -2919,7 +2924,7 @@
           <a:p>
             <a:fld id="{16E7E9E6-0AF9-480C-A1F8-8E6CDA39B193}" type="datetimeFigureOut">
               <a:rPr kumimoji="1" lang="ja-JP" altLang="en-US" smtClean="0"/>
-              <a:t>2026/6/11</a:t>
+              <a:t>2026/6/18</a:t>
             </a:fld>
             <a:endParaRPr kumimoji="1" lang="ja-JP" altLang="en-US"/>
           </a:p>
@@ -3192,7 +3197,7 @@
           <a:p>
             <a:fld id="{16E7E9E6-0AF9-480C-A1F8-8E6CDA39B193}" type="datetimeFigureOut">
               <a:rPr kumimoji="1" lang="ja-JP" altLang="en-US" smtClean="0"/>
-              <a:t>2026/6/11</a:t>
+              <a:t>2026/6/18</a:t>
             </a:fld>
             <a:endParaRPr kumimoji="1" lang="ja-JP" altLang="en-US"/>
           </a:p>
@@ -3623,8 +3628,8 @@
         </p:nvSpPr>
         <p:spPr>
           <a:xfrm>
-            <a:off x="290456" y="365760"/>
-            <a:ext cx="8392041" cy="1200329"/>
+            <a:off x="301886" y="331470"/>
+            <a:ext cx="9777035" cy="2031325"/>
           </a:xfrm>
           <a:prstGeom prst="rect">
             <a:avLst/>
@@ -3677,25 +3682,40 @@
           <a:p>
             <a:r>
               <a:rPr lang="ja-JP" altLang="en-US" dirty="0"/>
-              <a:t>・壁ジャンプさせたい場所では</a:t>
+              <a:t>・中心の町を基準に北・東・西を</a:t>
+            </a:r>
+            <a:r>
+              <a:rPr lang="en-US" altLang="ja-JP" dirty="0"/>
+              <a:t>1</a:t>
+            </a:r>
+            <a:r>
+              <a:rPr lang="ja-JP" altLang="en-US" dirty="0"/>
+              <a:t>・２・３ステージとして、エクストラステージを南にする</a:t>
+            </a:r>
+            <a:endParaRPr lang="en-US" altLang="ja-JP" dirty="0"/>
+          </a:p>
+          <a:p>
+            <a:r>
+              <a:rPr lang="ja-JP" altLang="en-US" dirty="0"/>
+              <a:t>・基本は</a:t>
+            </a:r>
+            <a:r>
+              <a:rPr lang="en-US" altLang="ja-JP" dirty="0"/>
+              <a:t>3D</a:t>
+            </a:r>
+            <a:r>
+              <a:rPr lang="ja-JP" altLang="en-US" dirty="0"/>
+              <a:t>アクション。壁ジャンプさせたいようなアクションエリアでは</a:t>
             </a:r>
             <a:r>
               <a:rPr lang="en-US" altLang="ja-JP" dirty="0"/>
               <a:t>2D</a:t>
             </a:r>
+          </a:p>
+          <a:p>
             <a:r>
               <a:rPr lang="ja-JP" altLang="en-US" dirty="0"/>
-              <a:t>、それ以外は</a:t>
-            </a:r>
-            <a:r>
-              <a:rPr lang="en-US" altLang="ja-JP" dirty="0"/>
-              <a:t>3D</a:t>
-            </a:r>
-          </a:p>
-          <a:p>
-            <a:r>
-              <a:rPr lang="ja-JP" altLang="en-US" dirty="0"/>
-              <a:t>・多くはないがあ</a:t>
+              <a:t>・多くはないが</a:t>
             </a:r>
             <a:r>
               <a:rPr lang="en-US" altLang="ja-JP" dirty="0"/>
@@ -3706,6 +3726,115 @@
               <a:t>のときにも敵は存在する</a:t>
             </a:r>
             <a:endParaRPr lang="en-US" altLang="ja-JP" dirty="0"/>
+          </a:p>
+          <a:p>
+            <a:endParaRPr lang="en-US" altLang="ja-JP" dirty="0"/>
+          </a:p>
+          <a:p>
+            <a:r>
+              <a:rPr lang="ja-JP" altLang="en-US" dirty="0"/>
+              <a:t>・各ステージの進み方</a:t>
+            </a:r>
+            <a:endParaRPr lang="en-US" altLang="ja-JP" dirty="0"/>
+          </a:p>
+        </p:txBody>
+      </p:sp>
+      <p:sp>
+        <p:nvSpPr>
+          <p:cNvPr id="2" name="テキスト ボックス 1">
+            <a:extLst>
+              <a:ext uri="{FF2B5EF4-FFF2-40B4-BE49-F238E27FC236}">
+                <a16:creationId xmlns:a16="http://schemas.microsoft.com/office/drawing/2014/main" id="{C0AB83B0-AAFF-4EB2-8DE8-1EAAD3676E90}"/>
+              </a:ext>
+            </a:extLst>
+          </p:cNvPr>
+          <p:cNvSpPr txBox="1"/>
+          <p:nvPr/>
+        </p:nvSpPr>
+        <p:spPr>
+          <a:xfrm>
+            <a:off x="301886" y="2651760"/>
+            <a:ext cx="11541771" cy="1754326"/>
+          </a:xfrm>
+          <a:prstGeom prst="rect">
+            <a:avLst/>
+          </a:prstGeom>
+          <a:noFill/>
+        </p:spPr>
+        <p:txBody>
+          <a:bodyPr wrap="square" rtlCol="0">
+            <a:spAutoFit/>
+          </a:bodyPr>
+          <a:lstStyle/>
+          <a:p>
+            <a:r>
+              <a:rPr kumimoji="1" lang="ja-JP" altLang="en-US" dirty="0"/>
+              <a:t>探索エリア・アクションエリア・</a:t>
+            </a:r>
+            <a:r>
+              <a:rPr kumimoji="1" lang="en-US" altLang="ja-JP" dirty="0"/>
+              <a:t>(</a:t>
+            </a:r>
+            <a:r>
+              <a:rPr kumimoji="1" lang="ja-JP" altLang="en-US" dirty="0"/>
+              <a:t>大変そうだけ</a:t>
+            </a:r>
+            <a:r>
+              <a:rPr lang="ja-JP" altLang="en-US" dirty="0"/>
+              <a:t>どダンジョン的なのあったほうがよさそう何ならダンジョンをボスエリアにしたっていい</a:t>
+            </a:r>
+            <a:r>
+              <a:rPr kumimoji="1" lang="en-US" altLang="ja-JP" dirty="0"/>
+              <a:t>)</a:t>
+            </a:r>
+            <a:r>
+              <a:rPr kumimoji="1" lang="ja-JP" altLang="en-US" dirty="0"/>
+              <a:t>を進み、最後のボスエリアにいるボスを撃破でステージクリア</a:t>
+            </a:r>
+            <a:endParaRPr kumimoji="1" lang="en-US" altLang="ja-JP" dirty="0"/>
+          </a:p>
+          <a:p>
+            <a:r>
+              <a:rPr lang="ja-JP" altLang="en-US" dirty="0"/>
+              <a:t>ステージクリア後別のステージへ行くことが可能になる。</a:t>
+            </a:r>
+            <a:endParaRPr lang="en-US" altLang="ja-JP" dirty="0"/>
+          </a:p>
+          <a:p>
+            <a:endParaRPr kumimoji="1" lang="en-US" altLang="ja-JP" dirty="0"/>
+          </a:p>
+          <a:p>
+            <a:r>
+              <a:rPr kumimoji="1" lang="ja-JP" altLang="en-US" dirty="0"/>
+              <a:t>敵</a:t>
+            </a:r>
+            <a:r>
+              <a:rPr lang="ja-JP" altLang="en-US" dirty="0"/>
+              <a:t>は</a:t>
+            </a:r>
+            <a:r>
+              <a:rPr lang="en-US" altLang="ja-JP" dirty="0"/>
+              <a:t>1</a:t>
+            </a:r>
+            <a:r>
+              <a:rPr lang="ja-JP" altLang="en-US" dirty="0"/>
+              <a:t>エリア倒すとエリア移動をしない限りリポップしない。</a:t>
+            </a:r>
+            <a:endParaRPr lang="en-US" altLang="ja-JP" dirty="0"/>
+          </a:p>
+          <a:p>
+            <a:r>
+              <a:rPr lang="en-US" altLang="ja-JP" dirty="0"/>
+              <a:t>1</a:t>
+            </a:r>
+            <a:r>
+              <a:rPr lang="ja-JP" altLang="en-US" dirty="0"/>
+              <a:t>度倒した</a:t>
+            </a:r>
+            <a:r>
+              <a:rPr kumimoji="1" lang="ja-JP" altLang="en-US" dirty="0"/>
+              <a:t>ボスはエリア移動でもリポップせずボスエリアで任意で再戦可能</a:t>
+            </a:r>
           </a:p>
         </p:txBody>
       </p:sp>
